--- a/assets/pptx/catalog-97.pptx
+++ b/assets/pptx/catalog-97.pptx
@@ -3247,7 +3247,7 @@
                 <a:ea typeface="Ebrima"/>
                 <a:cs typeface="Ebrima"/>
               </a:rPr>
-              <a:t>- ጌታ ላመስግንህ ጌታ ልገዛልህ (4x)</a:t>
+              <a:t>- ጌታ ላመስግንህ ጌታ ልገዛልህ 4x</a:t>
             </a:r>
           </a:p>
           <a:p>
@@ -3265,7 +3265,7 @@
                 <a:ea typeface="Ebrima"/>
                 <a:cs typeface="Ebrima"/>
               </a:rPr>
-              <a:t>ክብር ክብር ሃሌሉያ ክብር ላንተ ይሁን (3x)</a:t>
+              <a:t>ክብር ክብር ሃሌሉያ ክብር ላንተ ይሁን 3x</a:t>
             </a:r>
           </a:p>
         </p:txBody>
@@ -3350,7 +3350,7 @@
                 <a:ea typeface="Ebrima"/>
                 <a:cs typeface="Ebrima"/>
               </a:rPr>
-              <a:t>የሚያስፈራኝ ማንም የለም ጋሻዬ ነህ ለዘላለም (2x)</a:t>
+              <a:t>የሚያስፈራኝ ማንም የለም ጋሻዬ ነህ ለዘላለም 2x</a:t>
             </a:r>
           </a:p>
         </p:txBody>
@@ -3417,7 +3417,7 @@
                 <a:ea typeface="Ebrima"/>
                 <a:cs typeface="Ebrima"/>
               </a:rPr>
-              <a:t>- ጌታ ላመስግንህ ጌታ ልገዛልህ(4x)</a:t>
+              <a:t>- ጌታ ላመስግንህ ጌታ ልገዛልህ4x</a:t>
             </a:r>
           </a:p>
           <a:p>
@@ -3435,7 +3435,7 @@
                 <a:ea typeface="Ebrima"/>
                 <a:cs typeface="Ebrima"/>
               </a:rPr>
-              <a:t>ክብር ክብር ሃሌሉያ ክብር ላንተ ይሁን (3x)</a:t>
+              <a:t>ክብር ክብር ሃሌሉያ ክብር ላንተ ይሁን 3x</a:t>
             </a:r>
           </a:p>
         </p:txBody>
@@ -3520,7 +3520,7 @@
                 <a:ea typeface="Ebrima"/>
                 <a:cs typeface="Ebrima"/>
               </a:rPr>
-              <a:t>በሰላም ትጠብቃለህ ከጥፋት ትጋርዳለህ (2x)</a:t>
+              <a:t>በሰላም ትጠብቃለህ ከጥፋት ትጋርዳለህ 2x</a:t>
             </a:r>
           </a:p>
         </p:txBody>
@@ -3587,7 +3587,7 @@
                 <a:ea typeface="Ebrima"/>
                 <a:cs typeface="Ebrima"/>
               </a:rPr>
-              <a:t>- ጌታ ላመስግንህ ጌታ ልገዛልህ (4x)</a:t>
+              <a:t>- ጌታ ላመስግንህ ጌታ ልገዛልህ 4x</a:t>
             </a:r>
           </a:p>
           <a:p>
@@ -3605,7 +3605,7 @@
                 <a:ea typeface="Ebrima"/>
                 <a:cs typeface="Ebrima"/>
               </a:rPr>
-              <a:t>ክብር ክብር ሃሌሉያ ክብር ላንተ ይሁን (3x)</a:t>
+              <a:t>ክብር ክብር ሃሌሉያ ክብር ላንተ ይሁን 3x</a:t>
             </a:r>
           </a:p>
         </p:txBody>
@@ -3690,7 +3690,7 @@
                 <a:ea typeface="Ebrima"/>
                 <a:cs typeface="Ebrima"/>
               </a:rPr>
-              <a:t>በስምህ ተጠርቻለሁ ዘላለም ለአንተ እኖራለሁ (2x)</a:t>
+              <a:t>በስምህ ተጠርቻለሁ ዘላለም ለአንተ እኖራለሁ 2x</a:t>
             </a:r>
           </a:p>
         </p:txBody>
@@ -3757,7 +3757,7 @@
                 <a:ea typeface="Ebrima"/>
                 <a:cs typeface="Ebrima"/>
               </a:rPr>
-              <a:t>- ጌታ ላመስግንህ ጌታ ልገዛልህ (4x)</a:t>
+              <a:t>- ጌታ ላመስግንህ ጌታ ልገዛልህ 4x</a:t>
             </a:r>
           </a:p>
           <a:p>
@@ -3775,7 +3775,7 @@
                 <a:ea typeface="Ebrima"/>
                 <a:cs typeface="Ebrima"/>
               </a:rPr>
-              <a:t>ክብር ክብር ሃሌሉያ ክብር ላንተ ይሁን (3x)</a:t>
+              <a:t>ክብር ክብር ሃሌሉያ ክብር ላንተ ይሁን 3x</a:t>
             </a:r>
           </a:p>
         </p:txBody>
